--- a/Cource_LAB_Docker_4_Docker-Deep Learning.pptx
+++ b/Cource_LAB_Docker_4_Docker-Deep Learning.pptx
@@ -3738,7 +3738,7 @@
           <a:p>
             <a:fld id="{7A02337E-4703-49AB-8D81-EA2F8A6577FC}" type="datetimeFigureOut">
               <a:rPr lang="en-US" smtClean="0"/>
-              <a:t>10/7/2025</a:t>
+              <a:t>9/18/2026</a:t>
             </a:fld>
             <a:endParaRPr lang="en-US"/>
           </a:p>
@@ -3909,7 +3909,7 @@
           <a:p>
             <a:fld id="{7A02337E-4703-49AB-8D81-EA2F8A6577FC}" type="datetimeFigureOut">
               <a:rPr lang="en-US" smtClean="0"/>
-              <a:t>10/7/2025</a:t>
+              <a:t>9/18/2026</a:t>
             </a:fld>
             <a:endParaRPr lang="en-US"/>
           </a:p>
@@ -4090,7 +4090,7 @@
           <a:p>
             <a:fld id="{7A02337E-4703-49AB-8D81-EA2F8A6577FC}" type="datetimeFigureOut">
               <a:rPr lang="en-US" smtClean="0"/>
-              <a:t>10/7/2025</a:t>
+              <a:t>9/18/2026</a:t>
             </a:fld>
             <a:endParaRPr lang="en-US"/>
           </a:p>
@@ -4261,7 +4261,7 @@
           <a:p>
             <a:fld id="{48A87A34-81AB-432B-8DAE-1953F412C126}" type="datetimeFigureOut">
               <a:rPr lang="en-US" smtClean="0"/>
-              <a:t>10/7/2025</a:t>
+              <a:t>9/18/2026</a:t>
             </a:fld>
             <a:endParaRPr lang="en-US" dirty="0"/>
           </a:p>
@@ -4507,7 +4507,7 @@
           <a:p>
             <a:fld id="{7A02337E-4703-49AB-8D81-EA2F8A6577FC}" type="datetimeFigureOut">
               <a:rPr lang="en-US" smtClean="0"/>
-              <a:t>10/7/2025</a:t>
+              <a:t>9/18/2026</a:t>
             </a:fld>
             <a:endParaRPr lang="en-US"/>
           </a:p>
@@ -4740,7 +4740,7 @@
           <a:p>
             <a:fld id="{7A02337E-4703-49AB-8D81-EA2F8A6577FC}" type="datetimeFigureOut">
               <a:rPr lang="en-US" smtClean="0"/>
-              <a:t>10/7/2025</a:t>
+              <a:t>9/18/2026</a:t>
             </a:fld>
             <a:endParaRPr lang="en-US"/>
           </a:p>
@@ -5108,7 +5108,7 @@
           <a:p>
             <a:fld id="{7A02337E-4703-49AB-8D81-EA2F8A6577FC}" type="datetimeFigureOut">
               <a:rPr lang="en-US" smtClean="0"/>
-              <a:t>10/7/2025</a:t>
+              <a:t>9/18/2026</a:t>
             </a:fld>
             <a:endParaRPr lang="en-US"/>
           </a:p>
@@ -5227,7 +5227,7 @@
           <a:p>
             <a:fld id="{7A02337E-4703-49AB-8D81-EA2F8A6577FC}" type="datetimeFigureOut">
               <a:rPr lang="en-US" smtClean="0"/>
-              <a:t>10/7/2025</a:t>
+              <a:t>9/18/2026</a:t>
             </a:fld>
             <a:endParaRPr lang="en-US"/>
           </a:p>
@@ -5323,7 +5323,7 @@
           <a:p>
             <a:fld id="{7A02337E-4703-49AB-8D81-EA2F8A6577FC}" type="datetimeFigureOut">
               <a:rPr lang="en-US" smtClean="0"/>
-              <a:t>10/7/2025</a:t>
+              <a:t>9/18/2026</a:t>
             </a:fld>
             <a:endParaRPr lang="en-US"/>
           </a:p>
@@ -5601,7 +5601,7 @@
           <a:p>
             <a:fld id="{7A02337E-4703-49AB-8D81-EA2F8A6577FC}" type="datetimeFigureOut">
               <a:rPr lang="en-US" smtClean="0"/>
-              <a:t>10/7/2025</a:t>
+              <a:t>9/18/2026</a:t>
             </a:fld>
             <a:endParaRPr lang="en-US"/>
           </a:p>
@@ -5855,7 +5855,7 @@
           <a:p>
             <a:fld id="{7A02337E-4703-49AB-8D81-EA2F8A6577FC}" type="datetimeFigureOut">
               <a:rPr lang="en-US" smtClean="0"/>
-              <a:t>10/7/2025</a:t>
+              <a:t>9/18/2026</a:t>
             </a:fld>
             <a:endParaRPr lang="en-US"/>
           </a:p>
@@ -6069,7 +6069,7 @@
           <a:p>
             <a:fld id="{7A02337E-4703-49AB-8D81-EA2F8A6577FC}" type="datetimeFigureOut">
               <a:rPr lang="en-US" smtClean="0"/>
-              <a:t>10/7/2025</a:t>
+              <a:t>9/18/2026</a:t>
             </a:fld>
             <a:endParaRPr lang="en-US"/>
           </a:p>
@@ -7848,90 +7848,6 @@
           </p:txBody>
         </p:sp>
       </p:grpSp>
-      <p:sp>
-        <p:nvSpPr>
-          <p:cNvPr id="22" name="Rectangle 21"/>
-          <p:cNvSpPr/>
-          <p:nvPr/>
-        </p:nvSpPr>
-        <p:spPr>
-          <a:xfrm>
-            <a:off x="6683644" y="4335788"/>
-            <a:ext cx="2613761" cy="230832"/>
-          </a:xfrm>
-          <a:prstGeom prst="rect">
-            <a:avLst/>
-          </a:prstGeom>
-        </p:spPr>
-        <p:txBody>
-          <a:bodyPr wrap="square">
-            <a:spAutoFit/>
-          </a:bodyPr>
-          <a:lstStyle/>
-          <a:p>
-            <a:r>
-              <a:rPr lang="en-US" sz="900" dirty="0"/>
-              <a:t>https://www.youtube.com/@AmelOline/videos</a:t>
-            </a:r>
-          </a:p>
-        </p:txBody>
-      </p:sp>
-      <p:sp>
-        <p:nvSpPr>
-          <p:cNvPr id="23" name="Rectangle 22"/>
-          <p:cNvSpPr/>
-          <p:nvPr/>
-        </p:nvSpPr>
-        <p:spPr>
-          <a:xfrm>
-            <a:off x="7520552" y="4197289"/>
-            <a:ext cx="1623448" cy="230832"/>
-          </a:xfrm>
-          <a:prstGeom prst="rect">
-            <a:avLst/>
-          </a:prstGeom>
-        </p:spPr>
-        <p:txBody>
-          <a:bodyPr wrap="square">
-            <a:spAutoFit/>
-          </a:bodyPr>
-          <a:lstStyle/>
-          <a:p>
-            <a:r>
-              <a:rPr lang="en-US" sz="900" dirty="0"/>
-              <a:t>https://github.com/siagianp</a:t>
-            </a:r>
-          </a:p>
-        </p:txBody>
-      </p:sp>
-      <p:sp>
-        <p:nvSpPr>
-          <p:cNvPr id="2" name="Rectangle 1"/>
-          <p:cNvSpPr/>
-          <p:nvPr/>
-        </p:nvSpPr>
-        <p:spPr>
-          <a:xfrm>
-            <a:off x="5707251" y="4474288"/>
-            <a:ext cx="3667194" cy="230832"/>
-          </a:xfrm>
-          <a:prstGeom prst="rect">
-            <a:avLst/>
-          </a:prstGeom>
-        </p:spPr>
-        <p:txBody>
-          <a:bodyPr wrap="square">
-            <a:spAutoFit/>
-          </a:bodyPr>
-          <a:lstStyle/>
-          <a:p>
-            <a:r>
-              <a:rPr lang="en-US" sz="900" dirty="0"/>
-              <a:t>https://github.com/amelcharolinesgn2/IoT_simulator-mqtt-NodeRed</a:t>
-            </a:r>
-          </a:p>
-        </p:txBody>
-      </p:sp>
       <p:pic>
         <p:nvPicPr>
           <p:cNvPr id="4" name="Picture 3"/>
@@ -8195,7 +8111,6 @@
               <a:rPr lang="en-US" sz="3200" dirty="0" smtClean="0"/>
               <a:t>Docker</a:t>
             </a:r>
-            <a:endParaRPr lang="en-US" sz="3200" dirty="0" smtClean="0"/>
           </a:p>
           <a:p>
             <a:pPr algn="l"/>
@@ -8218,7 +8133,6 @@
               <a:rPr lang="en-US" sz="3200" dirty="0"/>
               <a:t>Learning</a:t>
             </a:r>
-            <a:endParaRPr lang="en-US" sz="3200" dirty="0"/>
           </a:p>
         </p:txBody>
       </p:sp>
@@ -8278,57 +8192,431 @@
       </p:sp>
       <p:sp>
         <p:nvSpPr>
-          <p:cNvPr id="3" name="Rectangle 2"/>
+          <p:cNvPr id="25" name="Rectangle 24"/>
           <p:cNvSpPr/>
           <p:nvPr/>
         </p:nvSpPr>
         <p:spPr>
           <a:xfrm>
-            <a:off x="6152941" y="4612787"/>
-            <a:ext cx="3204723" cy="230832"/>
+            <a:off x="6732841" y="4860928"/>
+            <a:ext cx="2218246" cy="169277"/>
           </a:xfrm>
           <a:prstGeom prst="rect">
             <a:avLst/>
           </a:prstGeom>
         </p:spPr>
         <p:txBody>
-          <a:bodyPr wrap="none">
+          <a:bodyPr wrap="square">
             <a:spAutoFit/>
           </a:bodyPr>
           <a:lstStyle/>
           <a:p>
             <a:r>
-              <a:rPr lang="en-US" sz="900" dirty="0"/>
-              <a:t>https://github.com/amelcharolinesgn2/Cloud-Infrastructures</a:t>
-            </a:r>
-          </a:p>
-        </p:txBody>
-      </p:sp>
-      <p:sp>
-        <p:nvSpPr>
-          <p:cNvPr id="24" name="Rectangle 23"/>
+              <a:rPr lang="en-US" sz="500" dirty="0"/>
+              <a:t>https</a:t>
+            </a:r>
+            <a:r>
+              <a:rPr lang="en-US" sz="500" dirty="0" smtClean="0"/>
+              <a:t>://github.com/amelcharolinesgn2/IoT_simulator-mqtt-NodeRed</a:t>
+            </a:r>
+            <a:endParaRPr lang="en-US" sz="500" dirty="0"/>
+          </a:p>
+        </p:txBody>
+      </p:sp>
+      <p:sp>
+        <p:nvSpPr>
+          <p:cNvPr id="28" name="Rectangle 27"/>
           <p:cNvSpPr/>
           <p:nvPr/>
         </p:nvSpPr>
         <p:spPr>
           <a:xfrm>
-            <a:off x="5620344" y="4785911"/>
-            <a:ext cx="3839513" cy="230832"/>
+            <a:off x="7399424" y="4226014"/>
+            <a:ext cx="1301349" cy="150490"/>
           </a:xfrm>
           <a:prstGeom prst="rect">
             <a:avLst/>
           </a:prstGeom>
         </p:spPr>
         <p:txBody>
+          <a:bodyPr wrap="square">
+            <a:spAutoFit/>
+          </a:bodyPr>
+          <a:lstStyle/>
+          <a:p>
+            <a:pPr algn="r"/>
+            <a:r>
+              <a:rPr lang="en-US" sz="378" dirty="0"/>
+              <a:t>https://www.youtube.com/@AmelOline/videos</a:t>
+            </a:r>
+          </a:p>
+        </p:txBody>
+      </p:sp>
+      <p:sp>
+        <p:nvSpPr>
+          <p:cNvPr id="29" name="Rectangle 28"/>
+          <p:cNvSpPr/>
+          <p:nvPr/>
+        </p:nvSpPr>
+        <p:spPr>
+          <a:xfrm>
+            <a:off x="7811995" y="4163714"/>
+            <a:ext cx="879077" cy="150490"/>
+          </a:xfrm>
+          <a:prstGeom prst="rect">
+            <a:avLst/>
+          </a:prstGeom>
+        </p:spPr>
+        <p:txBody>
+          <a:bodyPr wrap="square">
+            <a:spAutoFit/>
+          </a:bodyPr>
+          <a:lstStyle/>
+          <a:p>
+            <a:pPr algn="r"/>
+            <a:r>
+              <a:rPr lang="en-US" sz="378" dirty="0"/>
+              <a:t>https://github.com/siagianp</a:t>
+            </a:r>
+          </a:p>
+        </p:txBody>
+      </p:sp>
+      <p:sp>
+        <p:nvSpPr>
+          <p:cNvPr id="30" name="Rectangle 29"/>
+          <p:cNvSpPr/>
+          <p:nvPr/>
+        </p:nvSpPr>
+        <p:spPr>
+          <a:xfrm>
+            <a:off x="7248692" y="4297613"/>
+            <a:ext cx="1452642" cy="150490"/>
+          </a:xfrm>
+          <a:prstGeom prst="rect">
+            <a:avLst/>
+          </a:prstGeom>
+        </p:spPr>
+        <p:txBody>
           <a:bodyPr wrap="none">
             <a:spAutoFit/>
           </a:bodyPr>
           <a:lstStyle/>
           <a:p>
-            <a:r>
-              <a:rPr lang="en-US" sz="900" dirty="0"/>
+            <a:pPr algn="r"/>
+            <a:r>
+              <a:rPr lang="en-US" sz="378" dirty="0"/>
+              <a:t>https://github.com/amelcharolinesgn2/Cloud-Infrastructures</a:t>
+            </a:r>
+          </a:p>
+        </p:txBody>
+      </p:sp>
+      <p:sp>
+        <p:nvSpPr>
+          <p:cNvPr id="31" name="Rectangle 30"/>
+          <p:cNvSpPr/>
+          <p:nvPr/>
+        </p:nvSpPr>
+        <p:spPr>
+          <a:xfrm>
+            <a:off x="6982594" y="4361639"/>
+            <a:ext cx="1718740" cy="150490"/>
+          </a:xfrm>
+          <a:prstGeom prst="rect">
+            <a:avLst/>
+          </a:prstGeom>
+        </p:spPr>
+        <p:txBody>
+          <a:bodyPr wrap="none">
+            <a:spAutoFit/>
+          </a:bodyPr>
+          <a:lstStyle/>
+          <a:p>
+            <a:pPr algn="r"/>
+            <a:r>
+              <a:rPr lang="en-US" sz="378" dirty="0"/>
               <a:t>https://github.com/amelcharolinesgn2/ClouD-Infrastructure-SISKA-2025</a:t>
             </a:r>
+          </a:p>
+        </p:txBody>
+      </p:sp>
+      <p:sp>
+        <p:nvSpPr>
+          <p:cNvPr id="32" name="Rectangle 31"/>
+          <p:cNvSpPr/>
+          <p:nvPr/>
+        </p:nvSpPr>
+        <p:spPr>
+          <a:xfrm>
+            <a:off x="7399424" y="4412582"/>
+            <a:ext cx="1301349" cy="150490"/>
+          </a:xfrm>
+          <a:prstGeom prst="rect">
+            <a:avLst/>
+          </a:prstGeom>
+        </p:spPr>
+        <p:txBody>
+          <a:bodyPr wrap="square">
+            <a:spAutoFit/>
+          </a:bodyPr>
+          <a:lstStyle/>
+          <a:p>
+            <a:pPr algn="r"/>
+            <a:r>
+              <a:rPr lang="en-US" sz="378" dirty="0"/>
+              <a:t>https://</a:t>
+            </a:r>
+            <a:r>
+              <a:rPr lang="en-US" sz="378" dirty="0" smtClean="0"/>
+              <a:t>github.com/amelcharolinesgn2/CCNA-1-v7</a:t>
+            </a:r>
+            <a:endParaRPr lang="en-US" sz="378" dirty="0"/>
+          </a:p>
+        </p:txBody>
+      </p:sp>
+      <p:sp>
+        <p:nvSpPr>
+          <p:cNvPr id="33" name="Rectangle 32"/>
+          <p:cNvSpPr/>
+          <p:nvPr/>
+        </p:nvSpPr>
+        <p:spPr>
+          <a:xfrm>
+            <a:off x="7399424" y="4474262"/>
+            <a:ext cx="1301349" cy="150490"/>
+          </a:xfrm>
+          <a:prstGeom prst="rect">
+            <a:avLst/>
+          </a:prstGeom>
+        </p:spPr>
+        <p:txBody>
+          <a:bodyPr wrap="square">
+            <a:spAutoFit/>
+          </a:bodyPr>
+          <a:lstStyle/>
+          <a:p>
+            <a:pPr algn="r"/>
+            <a:r>
+              <a:rPr lang="en-US" sz="378" dirty="0"/>
+              <a:t>https://</a:t>
+            </a:r>
+            <a:r>
+              <a:rPr lang="en-US" sz="378" dirty="0" smtClean="0"/>
+              <a:t>github.com/amelcharolinesgn2/CCNA-2-v7</a:t>
+            </a:r>
+            <a:endParaRPr lang="en-US" sz="378" dirty="0"/>
+          </a:p>
+        </p:txBody>
+      </p:sp>
+      <p:sp>
+        <p:nvSpPr>
+          <p:cNvPr id="34" name="Rectangle 33"/>
+          <p:cNvSpPr/>
+          <p:nvPr/>
+        </p:nvSpPr>
+        <p:spPr>
+          <a:xfrm>
+            <a:off x="7400546" y="4730150"/>
+            <a:ext cx="1301349" cy="208647"/>
+          </a:xfrm>
+          <a:prstGeom prst="rect">
+            <a:avLst/>
+          </a:prstGeom>
+        </p:spPr>
+        <p:txBody>
+          <a:bodyPr wrap="square">
+            <a:spAutoFit/>
+          </a:bodyPr>
+          <a:lstStyle/>
+          <a:p>
+            <a:pPr algn="r"/>
+            <a:r>
+              <a:rPr lang="en-US" sz="378" dirty="0">
+                <a:hlinkClick r:id="rId8"/>
+              </a:rPr>
+              <a:t>https://github.com/amelcharolinesgn2/AWS</a:t>
+            </a:r>
+            <a:r>
+              <a:rPr lang="en-US" sz="378" dirty="0"/>
+              <a:t> Certificate</a:t>
+            </a:r>
+          </a:p>
+        </p:txBody>
+      </p:sp>
+      <p:sp>
+        <p:nvSpPr>
+          <p:cNvPr id="35" name="Rectangle 34"/>
+          <p:cNvSpPr/>
+          <p:nvPr/>
+        </p:nvSpPr>
+        <p:spPr>
+          <a:xfrm>
+            <a:off x="7400546" y="4788307"/>
+            <a:ext cx="1301349" cy="150490"/>
+          </a:xfrm>
+          <a:prstGeom prst="rect">
+            <a:avLst/>
+          </a:prstGeom>
+        </p:spPr>
+        <p:txBody>
+          <a:bodyPr wrap="square">
+            <a:spAutoFit/>
+          </a:bodyPr>
+          <a:lstStyle/>
+          <a:p>
+            <a:pPr algn="r"/>
+            <a:r>
+              <a:rPr lang="en-US" sz="378" dirty="0">
+                <a:hlinkClick r:id="rId8"/>
+              </a:rPr>
+              <a:t>https://</a:t>
+            </a:r>
+            <a:r>
+              <a:rPr lang="en-US" sz="378" dirty="0" smtClean="0">
+                <a:hlinkClick r:id="rId8"/>
+              </a:rPr>
+              <a:t>github.com/amelcharolinesgn2/OpenStack</a:t>
+            </a:r>
+            <a:endParaRPr lang="en-US" sz="378" dirty="0"/>
+          </a:p>
+        </p:txBody>
+      </p:sp>
+      <p:sp>
+        <p:nvSpPr>
+          <p:cNvPr id="36" name="Rectangle 35"/>
+          <p:cNvSpPr/>
+          <p:nvPr/>
+        </p:nvSpPr>
+        <p:spPr>
+          <a:xfrm>
+            <a:off x="7399985" y="4671621"/>
+            <a:ext cx="1301349" cy="150490"/>
+          </a:xfrm>
+          <a:prstGeom prst="rect">
+            <a:avLst/>
+          </a:prstGeom>
+        </p:spPr>
+        <p:txBody>
+          <a:bodyPr wrap="square">
+            <a:spAutoFit/>
+          </a:bodyPr>
+          <a:lstStyle/>
+          <a:p>
+            <a:pPr algn="r"/>
+            <a:r>
+              <a:rPr lang="en-US" sz="378" dirty="0">
+                <a:hlinkClick r:id="rId8"/>
+              </a:rPr>
+              <a:t>https://</a:t>
+            </a:r>
+            <a:r>
+              <a:rPr lang="en-US" sz="378" dirty="0" smtClean="0">
+                <a:hlinkClick r:id="rId8"/>
+              </a:rPr>
+              <a:t>github.com/amelcharolinesgn2/CloudSim</a:t>
+            </a:r>
+            <a:endParaRPr lang="en-US" sz="378" dirty="0"/>
+          </a:p>
+        </p:txBody>
+      </p:sp>
+      <p:sp>
+        <p:nvSpPr>
+          <p:cNvPr id="37" name="Rectangle 36"/>
+          <p:cNvSpPr/>
+          <p:nvPr/>
+        </p:nvSpPr>
+        <p:spPr>
+          <a:xfrm>
+            <a:off x="7398863" y="4534372"/>
+            <a:ext cx="1301349" cy="150490"/>
+          </a:xfrm>
+          <a:prstGeom prst="rect">
+            <a:avLst/>
+          </a:prstGeom>
+        </p:spPr>
+        <p:txBody>
+          <a:bodyPr wrap="square">
+            <a:spAutoFit/>
+          </a:bodyPr>
+          <a:lstStyle/>
+          <a:p>
+            <a:pPr algn="r"/>
+            <a:r>
+              <a:rPr lang="en-US" sz="378" dirty="0"/>
+              <a:t>https://</a:t>
+            </a:r>
+            <a:r>
+              <a:rPr lang="en-US" sz="378" dirty="0" smtClean="0"/>
+              <a:t>github.com/amelcharolinesgn2/CCNA-3-v7</a:t>
+            </a:r>
+            <a:endParaRPr lang="en-US" sz="378" dirty="0"/>
+          </a:p>
+        </p:txBody>
+      </p:sp>
+      <p:sp>
+        <p:nvSpPr>
+          <p:cNvPr id="38" name="Rectangle 37"/>
+          <p:cNvSpPr/>
+          <p:nvPr/>
+        </p:nvSpPr>
+        <p:spPr>
+          <a:xfrm>
+            <a:off x="7398863" y="4583306"/>
+            <a:ext cx="1301349" cy="150490"/>
+          </a:xfrm>
+          <a:prstGeom prst="rect">
+            <a:avLst/>
+          </a:prstGeom>
+        </p:spPr>
+        <p:txBody>
+          <a:bodyPr wrap="square">
+            <a:spAutoFit/>
+          </a:bodyPr>
+          <a:lstStyle/>
+          <a:p>
+            <a:pPr algn="r"/>
+            <a:r>
+              <a:rPr lang="en-US" sz="378" dirty="0"/>
+              <a:t>https://</a:t>
+            </a:r>
+            <a:r>
+              <a:rPr lang="en-US" sz="378" dirty="0" smtClean="0"/>
+              <a:t>github.com/amelcharolinesgn2/CCNA-4-v7</a:t>
+            </a:r>
+            <a:endParaRPr lang="en-US" sz="378" dirty="0"/>
+          </a:p>
+        </p:txBody>
+      </p:sp>
+      <p:sp>
+        <p:nvSpPr>
+          <p:cNvPr id="39" name="Rectangle 38"/>
+          <p:cNvSpPr/>
+          <p:nvPr/>
+        </p:nvSpPr>
+        <p:spPr>
+          <a:xfrm>
+            <a:off x="7282182" y="4631047"/>
+            <a:ext cx="1408890" cy="150490"/>
+          </a:xfrm>
+          <a:prstGeom prst="rect">
+            <a:avLst/>
+          </a:prstGeom>
+        </p:spPr>
+        <p:txBody>
+          <a:bodyPr wrap="square">
+            <a:spAutoFit/>
+          </a:bodyPr>
+          <a:lstStyle/>
+          <a:p>
+            <a:pPr algn="r"/>
+            <a:r>
+              <a:rPr lang="en-US" sz="378" dirty="0"/>
+              <a:t>https://</a:t>
+            </a:r>
+            <a:r>
+              <a:rPr lang="en-US" sz="378" dirty="0" smtClean="0"/>
+              <a:t>github.com/amelcharolinesgn2/ANJAR_CCNP_Lab</a:t>
+            </a:r>
+            <a:endParaRPr lang="en-US" sz="378" dirty="0"/>
           </a:p>
         </p:txBody>
       </p:sp>
@@ -8489,13 +8777,6 @@
               </a:rPr>
               <a:t>Get Started with YOLOv5 🚀 in Docker</a:t>
             </a:r>
-            <a:endParaRPr lang="en-US" dirty="0">
-              <a:solidFill>
-                <a:schemeClr val="accent1">
-                  <a:lumMod val="50000"/>
-                </a:schemeClr>
-              </a:solidFill>
-            </a:endParaRPr>
           </a:p>
         </p:txBody>
       </p:sp>
@@ -11103,10 +11384,6 @@
             <a:r>
               <a:rPr lang="en-US" sz="1200" dirty="0"/>
               <a:t>.</a:t>
-            </a:r>
-            <a:r>
-              <a:rPr lang="en-US" sz="1200" dirty="0"/>
-              <a:t/>
             </a:r>
             <a:br>
               <a:rPr lang="en-US" sz="1200" dirty="0"/>
